--- a/1.8 Transport Layer/1.8.5 NAT.pptx
+++ b/1.8 Transport Layer/1.8.5 NAT.pptx
@@ -17,6 +17,21 @@
     <p:sldId id="265" r:id="rId11"/>
     <p:sldId id="266" r:id="rId12"/>
     <p:sldId id="267" r:id="rId13"/>
+    <p:sldId id="268" r:id="rId14"/>
+    <p:sldId id="270" r:id="rId15"/>
+    <p:sldId id="271" r:id="rId16"/>
+    <p:sldId id="272" r:id="rId17"/>
+    <p:sldId id="273" r:id="rId18"/>
+    <p:sldId id="274" r:id="rId19"/>
+    <p:sldId id="277" r:id="rId20"/>
+    <p:sldId id="278" r:id="rId21"/>
+    <p:sldId id="279" r:id="rId22"/>
+    <p:sldId id="280" r:id="rId23"/>
+    <p:sldId id="281" r:id="rId24"/>
+    <p:sldId id="275" r:id="rId25"/>
+    <p:sldId id="282" r:id="rId26"/>
+    <p:sldId id="283" r:id="rId27"/>
+    <p:sldId id="284" r:id="rId28"/>
   </p:sldIdLst>
   <p:sldSz cx="12192000" cy="6858000"/>
   <p:notesSz cx="6858000" cy="9144000"/>
@@ -115,6 +130,11 @@
       </a:defRPr>
     </a:lvl9pPr>
   </p:defaultTextStyle>
+  <p:extLst>
+    <p:ext uri="{EFAFB233-063F-42B5-8137-9DF3F51BA10A}">
+      <p15:sldGuideLst xmlns:p15="http://schemas.microsoft.com/office/powerpoint/2012/main"/>
+    </p:ext>
+  </p:extLst>
 </p:presentation>
 </file>
 
@@ -249,7 +269,7 @@
           <a:p>
             <a:fld id="{7D5C918B-9C96-49F5-960F-F5773254AD7D}" type="datetimeFigureOut">
               <a:rPr lang="ru-RU" smtClean="0"/>
-              <a:t>05.10.2026</a:t>
+              <a:t>14.10.2026</a:t>
             </a:fld>
             <a:endParaRPr lang="ru-RU"/>
           </a:p>
@@ -419,7 +439,7 @@
           <a:p>
             <a:fld id="{7D5C918B-9C96-49F5-960F-F5773254AD7D}" type="datetimeFigureOut">
               <a:rPr lang="ru-RU" smtClean="0"/>
-              <a:t>05.10.2026</a:t>
+              <a:t>14.10.2026</a:t>
             </a:fld>
             <a:endParaRPr lang="ru-RU"/>
           </a:p>
@@ -599,7 +619,7 @@
           <a:p>
             <a:fld id="{7D5C918B-9C96-49F5-960F-F5773254AD7D}" type="datetimeFigureOut">
               <a:rPr lang="ru-RU" smtClean="0"/>
-              <a:t>05.10.2026</a:t>
+              <a:t>14.10.2026</a:t>
             </a:fld>
             <a:endParaRPr lang="ru-RU"/>
           </a:p>
@@ -769,7 +789,7 @@
           <a:p>
             <a:fld id="{7D5C918B-9C96-49F5-960F-F5773254AD7D}" type="datetimeFigureOut">
               <a:rPr lang="ru-RU" smtClean="0"/>
-              <a:t>05.10.2026</a:t>
+              <a:t>14.10.2026</a:t>
             </a:fld>
             <a:endParaRPr lang="ru-RU"/>
           </a:p>
@@ -1015,7 +1035,7 @@
           <a:p>
             <a:fld id="{7D5C918B-9C96-49F5-960F-F5773254AD7D}" type="datetimeFigureOut">
               <a:rPr lang="ru-RU" smtClean="0"/>
-              <a:t>05.10.2026</a:t>
+              <a:t>14.10.2026</a:t>
             </a:fld>
             <a:endParaRPr lang="ru-RU"/>
           </a:p>
@@ -1247,7 +1267,7 @@
           <a:p>
             <a:fld id="{7D5C918B-9C96-49F5-960F-F5773254AD7D}" type="datetimeFigureOut">
               <a:rPr lang="ru-RU" smtClean="0"/>
-              <a:t>05.10.2026</a:t>
+              <a:t>14.10.2026</a:t>
             </a:fld>
             <a:endParaRPr lang="ru-RU"/>
           </a:p>
@@ -1614,7 +1634,7 @@
           <a:p>
             <a:fld id="{7D5C918B-9C96-49F5-960F-F5773254AD7D}" type="datetimeFigureOut">
               <a:rPr lang="ru-RU" smtClean="0"/>
-              <a:t>05.10.2026</a:t>
+              <a:t>14.10.2026</a:t>
             </a:fld>
             <a:endParaRPr lang="ru-RU"/>
           </a:p>
@@ -1732,7 +1752,7 @@
           <a:p>
             <a:fld id="{7D5C918B-9C96-49F5-960F-F5773254AD7D}" type="datetimeFigureOut">
               <a:rPr lang="ru-RU" smtClean="0"/>
-              <a:t>05.10.2026</a:t>
+              <a:t>14.10.2026</a:t>
             </a:fld>
             <a:endParaRPr lang="ru-RU"/>
           </a:p>
@@ -1827,7 +1847,7 @@
           <a:p>
             <a:fld id="{7D5C918B-9C96-49F5-960F-F5773254AD7D}" type="datetimeFigureOut">
               <a:rPr lang="ru-RU" smtClean="0"/>
-              <a:t>05.10.2026</a:t>
+              <a:t>14.10.2026</a:t>
             </a:fld>
             <a:endParaRPr lang="ru-RU"/>
           </a:p>
@@ -2104,7 +2124,7 @@
           <a:p>
             <a:fld id="{7D5C918B-9C96-49F5-960F-F5773254AD7D}" type="datetimeFigureOut">
               <a:rPr lang="ru-RU" smtClean="0"/>
-              <a:t>05.10.2026</a:t>
+              <a:t>14.10.2026</a:t>
             </a:fld>
             <a:endParaRPr lang="ru-RU"/>
           </a:p>
@@ -2357,7 +2377,7 @@
           <a:p>
             <a:fld id="{7D5C918B-9C96-49F5-960F-F5773254AD7D}" type="datetimeFigureOut">
               <a:rPr lang="ru-RU" smtClean="0"/>
-              <a:t>05.10.2026</a:t>
+              <a:t>14.10.2026</a:t>
             </a:fld>
             <a:endParaRPr lang="ru-RU"/>
           </a:p>
@@ -2570,7 +2590,7 @@
           <a:p>
             <a:fld id="{7D5C918B-9C96-49F5-960F-F5773254AD7D}" type="datetimeFigureOut">
               <a:rPr lang="ru-RU" smtClean="0"/>
-              <a:t>05.10.2026</a:t>
+              <a:t>14.10.2026</a:t>
             </a:fld>
             <a:endParaRPr lang="ru-RU"/>
           </a:p>
@@ -3250,26 +3270,81 @@
           <a:bodyPr/>
           <a:lstStyle/>
           <a:p>
-            <a:endParaRPr lang="ru-RU"/>
-          </a:p>
-        </p:txBody>
-      </p:sp>
-      <p:sp>
-        <p:nvSpPr>
-          <p:cNvPr id="3" name="Объект 2"/>
-          <p:cNvSpPr>
-            <a:spLocks noGrp="1"/>
-          </p:cNvSpPr>
+            <a:r>
+              <a:rPr lang="ru-RU" dirty="0" smtClean="0"/>
+              <a:t>Принцип работы </a:t>
+            </a:r>
+            <a:r>
+              <a:rPr lang="en-US" dirty="0" smtClean="0"/>
+              <a:t>NAT</a:t>
+            </a:r>
+            <a:endParaRPr lang="ru-RU" dirty="0"/>
+          </a:p>
+        </p:txBody>
+      </p:sp>
+      <p:pic>
+        <p:nvPicPr>
+          <p:cNvPr id="4" name="Объект 3"/>
+          <p:cNvPicPr>
+            <a:picLocks noGrp="1" noChangeAspect="1"/>
+          </p:cNvPicPr>
           <p:nvPr>
             <p:ph idx="1"/>
           </p:nvPr>
-        </p:nvSpPr>
-        <p:spPr/>
-        <p:txBody>
-          <a:bodyPr/>
-          <a:lstStyle/>
-          <a:p>
-            <a:endParaRPr lang="ru-RU"/>
+        </p:nvPicPr>
+        <p:blipFill>
+          <a:blip r:embed="rId2"/>
+          <a:stretch>
+            <a:fillRect/>
+          </a:stretch>
+        </p:blipFill>
+        <p:spPr>
+          <a:xfrm>
+            <a:off x="838200" y="2191327"/>
+            <a:ext cx="10515600" cy="4305734"/>
+          </a:xfrm>
+          <a:prstGeom prst="rect">
+            <a:avLst/>
+          </a:prstGeom>
+        </p:spPr>
+      </p:pic>
+      <p:sp>
+        <p:nvSpPr>
+          <p:cNvPr id="7" name="Прямоугольник 6"/>
+          <p:cNvSpPr/>
+          <p:nvPr/>
+        </p:nvSpPr>
+        <p:spPr>
+          <a:xfrm>
+            <a:off x="3305909" y="1506022"/>
+            <a:ext cx="5580182" cy="369332"/>
+          </a:xfrm>
+          <a:prstGeom prst="rect">
+            <a:avLst/>
+          </a:prstGeom>
+          <a:solidFill>
+            <a:schemeClr val="tx1"/>
+          </a:solidFill>
+        </p:spPr>
+        <p:txBody>
+          <a:bodyPr wrap="none">
+            <a:spAutoFit/>
+          </a:bodyPr>
+          <a:lstStyle/>
+          <a:p>
+            <a:r>
+              <a:rPr lang="af-ZA" dirty="0">
+                <a:solidFill>
+                  <a:schemeClr val="bg1"/>
+                </a:solidFill>
+              </a:rPr>
+              <a:t>ip nat inside source static 192.168.10.10 209.165.200.226</a:t>
+            </a:r>
+            <a:endParaRPr lang="ru-RU" dirty="0">
+              <a:solidFill>
+                <a:schemeClr val="bg1"/>
+              </a:solidFill>
+            </a:endParaRPr>
           </a:p>
         </p:txBody>
       </p:sp>
@@ -3277,6 +3352,636 @@
     <p:extLst>
       <p:ext uri="{BB962C8B-B14F-4D97-AF65-F5344CB8AC3E}">
         <p14:creationId xmlns:p14="http://schemas.microsoft.com/office/powerpoint/2010/main" val="4214264019"/>
+      </p:ext>
+    </p:extLst>
+  </p:cSld>
+  <p:clrMapOvr>
+    <a:masterClrMapping/>
+  </p:clrMapOvr>
+  <p:timing>
+    <p:tnLst>
+      <p:par>
+        <p:cTn id="1" dur="indefinite" restart="never" nodeType="tmRoot"/>
+      </p:par>
+    </p:tnLst>
+  </p:timing>
+</p:sld>
+</file>
+
+<file path=ppt/slides/slide13.xml><?xml version="1.0" encoding="utf-8"?>
+<p:sld xmlns:a="http://schemas.openxmlformats.org/drawingml/2006/main" xmlns:r="http://schemas.openxmlformats.org/officeDocument/2006/relationships" xmlns:p="http://schemas.openxmlformats.org/presentationml/2006/main">
+  <p:cSld>
+    <p:spTree>
+      <p:nvGrpSpPr>
+        <p:cNvPr id="1" name=""/>
+        <p:cNvGrpSpPr/>
+        <p:nvPr/>
+      </p:nvGrpSpPr>
+      <p:grpSpPr>
+        <a:xfrm>
+          <a:off x="0" y="0"/>
+          <a:ext cx="0" cy="0"/>
+          <a:chOff x="0" y="0"/>
+          <a:chExt cx="0" cy="0"/>
+        </a:xfrm>
+      </p:grpSpPr>
+      <p:sp>
+        <p:nvSpPr>
+          <p:cNvPr id="2" name="Заголовок 1"/>
+          <p:cNvSpPr>
+            <a:spLocks noGrp="1"/>
+          </p:cNvSpPr>
+          <p:nvPr>
+            <p:ph type="title"/>
+          </p:nvPr>
+        </p:nvSpPr>
+        <p:spPr/>
+        <p:txBody>
+          <a:bodyPr/>
+          <a:lstStyle/>
+          <a:p>
+            <a:r>
+              <a:rPr lang="ru-RU" dirty="0" smtClean="0"/>
+              <a:t>Принцип работы </a:t>
+            </a:r>
+            <a:r>
+              <a:rPr lang="en-US" smtClean="0"/>
+              <a:t>NAT</a:t>
+            </a:r>
+            <a:endParaRPr lang="ru-RU"/>
+          </a:p>
+        </p:txBody>
+      </p:sp>
+      <p:pic>
+        <p:nvPicPr>
+          <p:cNvPr id="5" name="Объект 4"/>
+          <p:cNvPicPr>
+            <a:picLocks noGrp="1" noChangeAspect="1"/>
+          </p:cNvPicPr>
+          <p:nvPr>
+            <p:ph idx="1"/>
+          </p:nvPr>
+        </p:nvPicPr>
+        <p:blipFill>
+          <a:blip r:embed="rId2"/>
+          <a:stretch>
+            <a:fillRect/>
+          </a:stretch>
+        </p:blipFill>
+        <p:spPr>
+          <a:xfrm>
+            <a:off x="838200" y="1981505"/>
+            <a:ext cx="10515600" cy="4039577"/>
+          </a:xfrm>
+          <a:prstGeom prst="rect">
+            <a:avLst/>
+          </a:prstGeom>
+        </p:spPr>
+      </p:pic>
+    </p:spTree>
+    <p:extLst>
+      <p:ext uri="{BB962C8B-B14F-4D97-AF65-F5344CB8AC3E}">
+        <p14:creationId xmlns:p14="http://schemas.microsoft.com/office/powerpoint/2010/main" val="3227317338"/>
+      </p:ext>
+    </p:extLst>
+  </p:cSld>
+  <p:clrMapOvr>
+    <a:masterClrMapping/>
+  </p:clrMapOvr>
+  <p:timing>
+    <p:tnLst>
+      <p:par>
+        <p:cTn id="1" dur="indefinite" restart="never" nodeType="tmRoot"/>
+      </p:par>
+    </p:tnLst>
+  </p:timing>
+</p:sld>
+</file>
+
+<file path=ppt/slides/slide14.xml><?xml version="1.0" encoding="utf-8"?>
+<p:sld xmlns:a="http://schemas.openxmlformats.org/drawingml/2006/main" xmlns:r="http://schemas.openxmlformats.org/officeDocument/2006/relationships" xmlns:p="http://schemas.openxmlformats.org/presentationml/2006/main">
+  <p:cSld>
+    <p:spTree>
+      <p:nvGrpSpPr>
+        <p:cNvPr id="1" name=""/>
+        <p:cNvGrpSpPr/>
+        <p:nvPr/>
+      </p:nvGrpSpPr>
+      <p:grpSpPr>
+        <a:xfrm>
+          <a:off x="0" y="0"/>
+          <a:ext cx="0" cy="0"/>
+          <a:chOff x="0" y="0"/>
+          <a:chExt cx="0" cy="0"/>
+        </a:xfrm>
+      </p:grpSpPr>
+      <p:sp>
+        <p:nvSpPr>
+          <p:cNvPr id="2" name="Заголовок 1"/>
+          <p:cNvSpPr>
+            <a:spLocks noGrp="1"/>
+          </p:cNvSpPr>
+          <p:nvPr>
+            <p:ph type="title"/>
+          </p:nvPr>
+        </p:nvSpPr>
+        <p:spPr/>
+        <p:txBody>
+          <a:bodyPr/>
+          <a:lstStyle/>
+          <a:p>
+            <a:r>
+              <a:rPr lang="ru-RU" dirty="0" smtClean="0"/>
+              <a:t>Принцип работы </a:t>
+            </a:r>
+            <a:r>
+              <a:rPr lang="en-US" smtClean="0"/>
+              <a:t>NAT</a:t>
+            </a:r>
+            <a:endParaRPr lang="ru-RU"/>
+          </a:p>
+        </p:txBody>
+      </p:sp>
+      <p:pic>
+        <p:nvPicPr>
+          <p:cNvPr id="5" name="Объект 4"/>
+          <p:cNvPicPr>
+            <a:picLocks noGrp="1" noChangeAspect="1"/>
+          </p:cNvPicPr>
+          <p:nvPr>
+            <p:ph idx="1"/>
+          </p:nvPr>
+        </p:nvPicPr>
+        <p:blipFill>
+          <a:blip r:embed="rId2"/>
+          <a:stretch>
+            <a:fillRect/>
+          </a:stretch>
+        </p:blipFill>
+        <p:spPr>
+          <a:xfrm>
+            <a:off x="1013740" y="1825625"/>
+            <a:ext cx="10164520" cy="4351338"/>
+          </a:xfrm>
+          <a:prstGeom prst="rect">
+            <a:avLst/>
+          </a:prstGeom>
+        </p:spPr>
+      </p:pic>
+    </p:spTree>
+    <p:extLst>
+      <p:ext uri="{BB962C8B-B14F-4D97-AF65-F5344CB8AC3E}">
+        <p14:creationId xmlns:p14="http://schemas.microsoft.com/office/powerpoint/2010/main" val="3617244883"/>
+      </p:ext>
+    </p:extLst>
+  </p:cSld>
+  <p:clrMapOvr>
+    <a:masterClrMapping/>
+  </p:clrMapOvr>
+  <p:timing>
+    <p:tnLst>
+      <p:par>
+        <p:cTn id="1" dur="indefinite" restart="never" nodeType="tmRoot"/>
+      </p:par>
+    </p:tnLst>
+  </p:timing>
+</p:sld>
+</file>
+
+<file path=ppt/slides/slide15.xml><?xml version="1.0" encoding="utf-8"?>
+<p:sld xmlns:a="http://schemas.openxmlformats.org/drawingml/2006/main" xmlns:r="http://schemas.openxmlformats.org/officeDocument/2006/relationships" xmlns:p="http://schemas.openxmlformats.org/presentationml/2006/main">
+  <p:cSld>
+    <p:spTree>
+      <p:nvGrpSpPr>
+        <p:cNvPr id="1" name=""/>
+        <p:cNvGrpSpPr/>
+        <p:nvPr/>
+      </p:nvGrpSpPr>
+      <p:grpSpPr>
+        <a:xfrm>
+          <a:off x="0" y="0"/>
+          <a:ext cx="0" cy="0"/>
+          <a:chOff x="0" y="0"/>
+          <a:chExt cx="0" cy="0"/>
+        </a:xfrm>
+      </p:grpSpPr>
+      <p:sp>
+        <p:nvSpPr>
+          <p:cNvPr id="2" name="Заголовок 1"/>
+          <p:cNvSpPr>
+            <a:spLocks noGrp="1"/>
+          </p:cNvSpPr>
+          <p:nvPr>
+            <p:ph type="title"/>
+          </p:nvPr>
+        </p:nvSpPr>
+        <p:spPr/>
+        <p:txBody>
+          <a:bodyPr/>
+          <a:lstStyle/>
+          <a:p>
+            <a:r>
+              <a:rPr lang="ru-RU" dirty="0" smtClean="0"/>
+              <a:t>Принцип работы </a:t>
+            </a:r>
+            <a:r>
+              <a:rPr lang="en-US" dirty="0" smtClean="0"/>
+              <a:t>NAT</a:t>
+            </a:r>
+            <a:endParaRPr lang="ru-RU" dirty="0"/>
+          </a:p>
+        </p:txBody>
+      </p:sp>
+      <p:pic>
+        <p:nvPicPr>
+          <p:cNvPr id="4" name="Объект 3"/>
+          <p:cNvPicPr>
+            <a:picLocks noGrp="1" noChangeAspect="1"/>
+          </p:cNvPicPr>
+          <p:nvPr>
+            <p:ph idx="1"/>
+          </p:nvPr>
+        </p:nvPicPr>
+        <p:blipFill>
+          <a:blip r:embed="rId2"/>
+          <a:stretch>
+            <a:fillRect/>
+          </a:stretch>
+        </p:blipFill>
+        <p:spPr>
+          <a:xfrm>
+            <a:off x="992208" y="1825625"/>
+            <a:ext cx="10207584" cy="4351338"/>
+          </a:xfrm>
+          <a:prstGeom prst="rect">
+            <a:avLst/>
+          </a:prstGeom>
+        </p:spPr>
+      </p:pic>
+    </p:spTree>
+    <p:extLst>
+      <p:ext uri="{BB962C8B-B14F-4D97-AF65-F5344CB8AC3E}">
+        <p14:creationId xmlns:p14="http://schemas.microsoft.com/office/powerpoint/2010/main" val="520483865"/>
+      </p:ext>
+    </p:extLst>
+  </p:cSld>
+  <p:clrMapOvr>
+    <a:masterClrMapping/>
+  </p:clrMapOvr>
+  <p:timing>
+    <p:tnLst>
+      <p:par>
+        <p:cTn id="1" dur="indefinite" restart="never" nodeType="tmRoot"/>
+      </p:par>
+    </p:tnLst>
+  </p:timing>
+</p:sld>
+</file>
+
+<file path=ppt/slides/slide16.xml><?xml version="1.0" encoding="utf-8"?>
+<p:sld xmlns:a="http://schemas.openxmlformats.org/drawingml/2006/main" xmlns:r="http://schemas.openxmlformats.org/officeDocument/2006/relationships" xmlns:p="http://schemas.openxmlformats.org/presentationml/2006/main">
+  <p:cSld>
+    <p:spTree>
+      <p:nvGrpSpPr>
+        <p:cNvPr id="1" name=""/>
+        <p:cNvGrpSpPr/>
+        <p:nvPr/>
+      </p:nvGrpSpPr>
+      <p:grpSpPr>
+        <a:xfrm>
+          <a:off x="0" y="0"/>
+          <a:ext cx="0" cy="0"/>
+          <a:chOff x="0" y="0"/>
+          <a:chExt cx="0" cy="0"/>
+        </a:xfrm>
+      </p:grpSpPr>
+      <p:sp>
+        <p:nvSpPr>
+          <p:cNvPr id="2" name="Заголовок 1"/>
+          <p:cNvSpPr>
+            <a:spLocks noGrp="1"/>
+          </p:cNvSpPr>
+          <p:nvPr>
+            <p:ph type="title"/>
+          </p:nvPr>
+        </p:nvSpPr>
+        <p:spPr/>
+        <p:txBody>
+          <a:bodyPr/>
+          <a:lstStyle/>
+          <a:p>
+            <a:r>
+              <a:rPr lang="ru-RU" dirty="0" smtClean="0"/>
+              <a:t>Принцип работы </a:t>
+            </a:r>
+            <a:r>
+              <a:rPr lang="en-US" dirty="0" smtClean="0"/>
+              <a:t>NAT</a:t>
+            </a:r>
+            <a:endParaRPr lang="ru-RU" dirty="0"/>
+          </a:p>
+        </p:txBody>
+      </p:sp>
+      <p:pic>
+        <p:nvPicPr>
+          <p:cNvPr id="5" name="Объект 4"/>
+          <p:cNvPicPr>
+            <a:picLocks noGrp="1" noChangeAspect="1"/>
+          </p:cNvPicPr>
+          <p:nvPr>
+            <p:ph idx="1"/>
+          </p:nvPr>
+        </p:nvPicPr>
+        <p:blipFill>
+          <a:blip r:embed="rId2"/>
+          <a:stretch>
+            <a:fillRect/>
+          </a:stretch>
+        </p:blipFill>
+        <p:spPr>
+          <a:xfrm>
+            <a:off x="1643491" y="1541364"/>
+            <a:ext cx="8905017" cy="4837822"/>
+          </a:xfrm>
+          <a:prstGeom prst="rect">
+            <a:avLst/>
+          </a:prstGeom>
+        </p:spPr>
+      </p:pic>
+    </p:spTree>
+    <p:extLst>
+      <p:ext uri="{BB962C8B-B14F-4D97-AF65-F5344CB8AC3E}">
+        <p14:creationId xmlns:p14="http://schemas.microsoft.com/office/powerpoint/2010/main" val="2567866046"/>
+      </p:ext>
+    </p:extLst>
+  </p:cSld>
+  <p:clrMapOvr>
+    <a:masterClrMapping/>
+  </p:clrMapOvr>
+  <p:timing>
+    <p:tnLst>
+      <p:par>
+        <p:cTn id="1" dur="indefinite" restart="never" nodeType="tmRoot"/>
+      </p:par>
+    </p:tnLst>
+  </p:timing>
+</p:sld>
+</file>
+
+<file path=ppt/slides/slide17.xml><?xml version="1.0" encoding="utf-8"?>
+<p:sld xmlns:a="http://schemas.openxmlformats.org/drawingml/2006/main" xmlns:r="http://schemas.openxmlformats.org/officeDocument/2006/relationships" xmlns:p="http://schemas.openxmlformats.org/presentationml/2006/main">
+  <p:cSld>
+    <p:spTree>
+      <p:nvGrpSpPr>
+        <p:cNvPr id="1" name=""/>
+        <p:cNvGrpSpPr/>
+        <p:nvPr/>
+      </p:nvGrpSpPr>
+      <p:grpSpPr>
+        <a:xfrm>
+          <a:off x="0" y="0"/>
+          <a:ext cx="0" cy="0"/>
+          <a:chOff x="0" y="0"/>
+          <a:chExt cx="0" cy="0"/>
+        </a:xfrm>
+      </p:grpSpPr>
+      <p:sp>
+        <p:nvSpPr>
+          <p:cNvPr id="2" name="Заголовок 1"/>
+          <p:cNvSpPr>
+            <a:spLocks noGrp="1"/>
+          </p:cNvSpPr>
+          <p:nvPr>
+            <p:ph type="title"/>
+          </p:nvPr>
+        </p:nvSpPr>
+        <p:spPr/>
+        <p:txBody>
+          <a:bodyPr/>
+          <a:lstStyle/>
+          <a:p>
+            <a:r>
+              <a:rPr lang="ru-RU" dirty="0" smtClean="0"/>
+              <a:t>Принцип работы </a:t>
+            </a:r>
+            <a:r>
+              <a:rPr lang="en-US" dirty="0" smtClean="0"/>
+              <a:t>NAT</a:t>
+            </a:r>
+            <a:endParaRPr lang="ru-RU" dirty="0"/>
+          </a:p>
+        </p:txBody>
+      </p:sp>
+      <p:pic>
+        <p:nvPicPr>
+          <p:cNvPr id="4" name="Объект 3"/>
+          <p:cNvPicPr>
+            <a:picLocks noGrp="1" noChangeAspect="1"/>
+          </p:cNvPicPr>
+          <p:nvPr>
+            <p:ph idx="1"/>
+          </p:nvPr>
+        </p:nvPicPr>
+        <p:blipFill>
+          <a:blip r:embed="rId2"/>
+          <a:stretch>
+            <a:fillRect/>
+          </a:stretch>
+        </p:blipFill>
+        <p:spPr>
+          <a:xfrm>
+            <a:off x="1746738" y="1369453"/>
+            <a:ext cx="8698524" cy="4948187"/>
+          </a:xfrm>
+          <a:prstGeom prst="rect">
+            <a:avLst/>
+          </a:prstGeom>
+        </p:spPr>
+      </p:pic>
+    </p:spTree>
+    <p:extLst>
+      <p:ext uri="{BB962C8B-B14F-4D97-AF65-F5344CB8AC3E}">
+        <p14:creationId xmlns:p14="http://schemas.microsoft.com/office/powerpoint/2010/main" val="3438473209"/>
+      </p:ext>
+    </p:extLst>
+  </p:cSld>
+  <p:clrMapOvr>
+    <a:masterClrMapping/>
+  </p:clrMapOvr>
+  <p:timing>
+    <p:tnLst>
+      <p:par>
+        <p:cTn id="1" dur="indefinite" restart="never" nodeType="tmRoot"/>
+      </p:par>
+    </p:tnLst>
+  </p:timing>
+</p:sld>
+</file>
+
+<file path=ppt/slides/slide18.xml><?xml version="1.0" encoding="utf-8"?>
+<p:sld xmlns:a="http://schemas.openxmlformats.org/drawingml/2006/main" xmlns:r="http://schemas.openxmlformats.org/officeDocument/2006/relationships" xmlns:p="http://schemas.openxmlformats.org/presentationml/2006/main">
+  <p:cSld>
+    <p:spTree>
+      <p:nvGrpSpPr>
+        <p:cNvPr id="1" name=""/>
+        <p:cNvGrpSpPr/>
+        <p:nvPr/>
+      </p:nvGrpSpPr>
+      <p:grpSpPr>
+        <a:xfrm>
+          <a:off x="0" y="0"/>
+          <a:ext cx="0" cy="0"/>
+          <a:chOff x="0" y="0"/>
+          <a:chExt cx="0" cy="0"/>
+        </a:xfrm>
+      </p:grpSpPr>
+      <p:sp>
+        <p:nvSpPr>
+          <p:cNvPr id="2" name="Заголовок 1"/>
+          <p:cNvSpPr>
+            <a:spLocks noGrp="1"/>
+          </p:cNvSpPr>
+          <p:nvPr>
+            <p:ph type="title"/>
+          </p:nvPr>
+        </p:nvSpPr>
+        <p:spPr/>
+        <p:txBody>
+          <a:bodyPr/>
+          <a:lstStyle/>
+          <a:p>
+            <a:r>
+              <a:rPr lang="ru-RU" dirty="0" smtClean="0"/>
+              <a:t>Принцип работы </a:t>
+            </a:r>
+            <a:r>
+              <a:rPr lang="en-US" dirty="0" smtClean="0"/>
+              <a:t>NAT</a:t>
+            </a:r>
+            <a:endParaRPr lang="ru-RU" dirty="0"/>
+          </a:p>
+        </p:txBody>
+      </p:sp>
+      <p:pic>
+        <p:nvPicPr>
+          <p:cNvPr id="5" name="Объект 4"/>
+          <p:cNvPicPr>
+            <a:picLocks noGrp="1" noChangeAspect="1"/>
+          </p:cNvPicPr>
+          <p:nvPr>
+            <p:ph idx="1"/>
+          </p:nvPr>
+        </p:nvPicPr>
+        <p:blipFill>
+          <a:blip r:embed="rId2"/>
+          <a:stretch>
+            <a:fillRect/>
+          </a:stretch>
+        </p:blipFill>
+        <p:spPr>
+          <a:xfrm>
+            <a:off x="1834003" y="1514246"/>
+            <a:ext cx="8523994" cy="4926486"/>
+          </a:xfrm>
+          <a:prstGeom prst="rect">
+            <a:avLst/>
+          </a:prstGeom>
+        </p:spPr>
+      </p:pic>
+    </p:spTree>
+    <p:extLst>
+      <p:ext uri="{BB962C8B-B14F-4D97-AF65-F5344CB8AC3E}">
+        <p14:creationId xmlns:p14="http://schemas.microsoft.com/office/powerpoint/2010/main" val="3457708581"/>
+      </p:ext>
+    </p:extLst>
+  </p:cSld>
+  <p:clrMapOvr>
+    <a:masterClrMapping/>
+  </p:clrMapOvr>
+  <p:timing>
+    <p:tnLst>
+      <p:par>
+        <p:cTn id="1" dur="indefinite" restart="never" nodeType="tmRoot"/>
+      </p:par>
+    </p:tnLst>
+  </p:timing>
+</p:sld>
+</file>
+
+<file path=ppt/slides/slide19.xml><?xml version="1.0" encoding="utf-8"?>
+<p:sld xmlns:a="http://schemas.openxmlformats.org/drawingml/2006/main" xmlns:r="http://schemas.openxmlformats.org/officeDocument/2006/relationships" xmlns:p="http://schemas.openxmlformats.org/presentationml/2006/main">
+  <p:cSld>
+    <p:spTree>
+      <p:nvGrpSpPr>
+        <p:cNvPr id="1" name=""/>
+        <p:cNvGrpSpPr/>
+        <p:nvPr/>
+      </p:nvGrpSpPr>
+      <p:grpSpPr>
+        <a:xfrm>
+          <a:off x="0" y="0"/>
+          <a:ext cx="0" cy="0"/>
+          <a:chOff x="0" y="0"/>
+          <a:chExt cx="0" cy="0"/>
+        </a:xfrm>
+      </p:grpSpPr>
+      <p:sp>
+        <p:nvSpPr>
+          <p:cNvPr id="2" name="Заголовок 1"/>
+          <p:cNvSpPr>
+            <a:spLocks noGrp="1"/>
+          </p:cNvSpPr>
+          <p:nvPr>
+            <p:ph type="title"/>
+          </p:nvPr>
+        </p:nvSpPr>
+        <p:spPr/>
+        <p:txBody>
+          <a:bodyPr/>
+          <a:lstStyle/>
+          <a:p>
+            <a:r>
+              <a:rPr lang="ru-RU" dirty="0" smtClean="0"/>
+              <a:t>Принцип работы </a:t>
+            </a:r>
+            <a:r>
+              <a:rPr lang="en-US" dirty="0" smtClean="0"/>
+              <a:t>NAT</a:t>
+            </a:r>
+            <a:endParaRPr lang="ru-RU" dirty="0"/>
+          </a:p>
+        </p:txBody>
+      </p:sp>
+      <p:pic>
+        <p:nvPicPr>
+          <p:cNvPr id="9" name="Объект 3"/>
+          <p:cNvPicPr>
+            <a:picLocks noGrp="1" noChangeAspect="1"/>
+          </p:cNvPicPr>
+          <p:nvPr>
+            <p:ph idx="1"/>
+          </p:nvPr>
+        </p:nvPicPr>
+        <p:blipFill>
+          <a:blip r:embed="rId2"/>
+          <a:stretch>
+            <a:fillRect/>
+          </a:stretch>
+        </p:blipFill>
+        <p:spPr>
+          <a:xfrm>
+            <a:off x="1836109" y="1310054"/>
+            <a:ext cx="8519781" cy="5016378"/>
+          </a:xfrm>
+          <a:prstGeom prst="rect">
+            <a:avLst/>
+          </a:prstGeom>
+        </p:spPr>
+      </p:pic>
+    </p:spTree>
+    <p:extLst>
+      <p:ext uri="{BB962C8B-B14F-4D97-AF65-F5344CB8AC3E}">
+        <p14:creationId xmlns:p14="http://schemas.microsoft.com/office/powerpoint/2010/main" val="2142820527"/>
       </p:ext>
     </p:extLst>
   </p:cSld>
@@ -3419,6 +4124,724 @@
     <p:extLst>
       <p:ext uri="{BB962C8B-B14F-4D97-AF65-F5344CB8AC3E}">
         <p14:creationId xmlns:p14="http://schemas.microsoft.com/office/powerpoint/2010/main" val="2569492030"/>
+      </p:ext>
+    </p:extLst>
+  </p:cSld>
+  <p:clrMapOvr>
+    <a:masterClrMapping/>
+  </p:clrMapOvr>
+  <p:timing>
+    <p:tnLst>
+      <p:par>
+        <p:cTn id="1" dur="indefinite" restart="never" nodeType="tmRoot"/>
+      </p:par>
+    </p:tnLst>
+  </p:timing>
+</p:sld>
+</file>
+
+<file path=ppt/slides/slide20.xml><?xml version="1.0" encoding="utf-8"?>
+<p:sld xmlns:a="http://schemas.openxmlformats.org/drawingml/2006/main" xmlns:r="http://schemas.openxmlformats.org/officeDocument/2006/relationships" xmlns:p="http://schemas.openxmlformats.org/presentationml/2006/main">
+  <p:cSld>
+    <p:spTree>
+      <p:nvGrpSpPr>
+        <p:cNvPr id="1" name=""/>
+        <p:cNvGrpSpPr/>
+        <p:nvPr/>
+      </p:nvGrpSpPr>
+      <p:grpSpPr>
+        <a:xfrm>
+          <a:off x="0" y="0"/>
+          <a:ext cx="0" cy="0"/>
+          <a:chOff x="0" y="0"/>
+          <a:chExt cx="0" cy="0"/>
+        </a:xfrm>
+      </p:grpSpPr>
+      <p:sp>
+        <p:nvSpPr>
+          <p:cNvPr id="2" name="Заголовок 1"/>
+          <p:cNvSpPr>
+            <a:spLocks noGrp="1"/>
+          </p:cNvSpPr>
+          <p:nvPr>
+            <p:ph type="title"/>
+          </p:nvPr>
+        </p:nvSpPr>
+        <p:spPr/>
+        <p:txBody>
+          <a:bodyPr/>
+          <a:lstStyle/>
+          <a:p>
+            <a:r>
+              <a:rPr lang="ru-RU" dirty="0" smtClean="0"/>
+              <a:t>Принцип работы </a:t>
+            </a:r>
+            <a:r>
+              <a:rPr lang="en-US" dirty="0" smtClean="0"/>
+              <a:t>NAT</a:t>
+            </a:r>
+            <a:endParaRPr lang="ru-RU" dirty="0"/>
+          </a:p>
+        </p:txBody>
+      </p:sp>
+      <p:pic>
+        <p:nvPicPr>
+          <p:cNvPr id="4" name="Объект 3"/>
+          <p:cNvPicPr>
+            <a:picLocks noGrp="1" noChangeAspect="1"/>
+          </p:cNvPicPr>
+          <p:nvPr>
+            <p:ph idx="1"/>
+          </p:nvPr>
+        </p:nvPicPr>
+        <p:blipFill>
+          <a:blip r:embed="rId2"/>
+          <a:stretch>
+            <a:fillRect/>
+          </a:stretch>
+        </p:blipFill>
+        <p:spPr>
+          <a:xfrm>
+            <a:off x="1641564" y="1389587"/>
+            <a:ext cx="8908871" cy="5068730"/>
+          </a:xfrm>
+          <a:prstGeom prst="rect">
+            <a:avLst/>
+          </a:prstGeom>
+        </p:spPr>
+      </p:pic>
+    </p:spTree>
+    <p:extLst>
+      <p:ext uri="{BB962C8B-B14F-4D97-AF65-F5344CB8AC3E}">
+        <p14:creationId xmlns:p14="http://schemas.microsoft.com/office/powerpoint/2010/main" val="909437817"/>
+      </p:ext>
+    </p:extLst>
+  </p:cSld>
+  <p:clrMapOvr>
+    <a:masterClrMapping/>
+  </p:clrMapOvr>
+  <p:timing>
+    <p:tnLst>
+      <p:par>
+        <p:cTn id="1" dur="indefinite" restart="never" nodeType="tmRoot"/>
+      </p:par>
+    </p:tnLst>
+  </p:timing>
+</p:sld>
+</file>
+
+<file path=ppt/slides/slide21.xml><?xml version="1.0" encoding="utf-8"?>
+<p:sld xmlns:a="http://schemas.openxmlformats.org/drawingml/2006/main" xmlns:r="http://schemas.openxmlformats.org/officeDocument/2006/relationships" xmlns:p="http://schemas.openxmlformats.org/presentationml/2006/main">
+  <p:cSld>
+    <p:spTree>
+      <p:nvGrpSpPr>
+        <p:cNvPr id="1" name=""/>
+        <p:cNvGrpSpPr/>
+        <p:nvPr/>
+      </p:nvGrpSpPr>
+      <p:grpSpPr>
+        <a:xfrm>
+          <a:off x="0" y="0"/>
+          <a:ext cx="0" cy="0"/>
+          <a:chOff x="0" y="0"/>
+          <a:chExt cx="0" cy="0"/>
+        </a:xfrm>
+      </p:grpSpPr>
+      <p:sp>
+        <p:nvSpPr>
+          <p:cNvPr id="2" name="Заголовок 1"/>
+          <p:cNvSpPr>
+            <a:spLocks noGrp="1"/>
+          </p:cNvSpPr>
+          <p:nvPr>
+            <p:ph type="title"/>
+          </p:nvPr>
+        </p:nvSpPr>
+        <p:spPr/>
+        <p:txBody>
+          <a:bodyPr/>
+          <a:lstStyle/>
+          <a:p>
+            <a:r>
+              <a:rPr lang="ru-RU" dirty="0" smtClean="0"/>
+              <a:t>Принцип работы </a:t>
+            </a:r>
+            <a:r>
+              <a:rPr lang="en-US" dirty="0" smtClean="0"/>
+              <a:t>NAT</a:t>
+            </a:r>
+            <a:endParaRPr lang="ru-RU" dirty="0"/>
+          </a:p>
+        </p:txBody>
+      </p:sp>
+      <p:pic>
+        <p:nvPicPr>
+          <p:cNvPr id="5" name="Объект 4"/>
+          <p:cNvPicPr>
+            <a:picLocks noGrp="1" noChangeAspect="1"/>
+          </p:cNvPicPr>
+          <p:nvPr>
+            <p:ph idx="1"/>
+          </p:nvPr>
+        </p:nvPicPr>
+        <p:blipFill>
+          <a:blip r:embed="rId2"/>
+          <a:stretch>
+            <a:fillRect/>
+          </a:stretch>
+        </p:blipFill>
+        <p:spPr>
+          <a:xfrm>
+            <a:off x="1653372" y="1350647"/>
+            <a:ext cx="8885255" cy="5028539"/>
+          </a:xfrm>
+          <a:prstGeom prst="rect">
+            <a:avLst/>
+          </a:prstGeom>
+        </p:spPr>
+      </p:pic>
+    </p:spTree>
+    <p:extLst>
+      <p:ext uri="{BB962C8B-B14F-4D97-AF65-F5344CB8AC3E}">
+        <p14:creationId xmlns:p14="http://schemas.microsoft.com/office/powerpoint/2010/main" val="4051077311"/>
+      </p:ext>
+    </p:extLst>
+  </p:cSld>
+  <p:clrMapOvr>
+    <a:masterClrMapping/>
+  </p:clrMapOvr>
+  <p:timing>
+    <p:tnLst>
+      <p:par>
+        <p:cTn id="1" dur="indefinite" restart="never" nodeType="tmRoot"/>
+      </p:par>
+    </p:tnLst>
+  </p:timing>
+</p:sld>
+</file>
+
+<file path=ppt/slides/slide22.xml><?xml version="1.0" encoding="utf-8"?>
+<p:sld xmlns:a="http://schemas.openxmlformats.org/drawingml/2006/main" xmlns:r="http://schemas.openxmlformats.org/officeDocument/2006/relationships" xmlns:p="http://schemas.openxmlformats.org/presentationml/2006/main">
+  <p:cSld>
+    <p:spTree>
+      <p:nvGrpSpPr>
+        <p:cNvPr id="1" name=""/>
+        <p:cNvGrpSpPr/>
+        <p:nvPr/>
+      </p:nvGrpSpPr>
+      <p:grpSpPr>
+        <a:xfrm>
+          <a:off x="0" y="0"/>
+          <a:ext cx="0" cy="0"/>
+          <a:chOff x="0" y="0"/>
+          <a:chExt cx="0" cy="0"/>
+        </a:xfrm>
+      </p:grpSpPr>
+      <p:sp>
+        <p:nvSpPr>
+          <p:cNvPr id="2" name="Заголовок 1"/>
+          <p:cNvSpPr>
+            <a:spLocks noGrp="1"/>
+          </p:cNvSpPr>
+          <p:nvPr>
+            <p:ph type="title"/>
+          </p:nvPr>
+        </p:nvSpPr>
+        <p:spPr/>
+        <p:txBody>
+          <a:bodyPr/>
+          <a:lstStyle/>
+          <a:p>
+            <a:r>
+              <a:rPr lang="ru-RU" dirty="0" smtClean="0"/>
+              <a:t>Принцип работы </a:t>
+            </a:r>
+            <a:r>
+              <a:rPr lang="en-US" dirty="0" smtClean="0"/>
+              <a:t>NAT</a:t>
+            </a:r>
+            <a:endParaRPr lang="ru-RU" dirty="0"/>
+          </a:p>
+        </p:txBody>
+      </p:sp>
+      <p:pic>
+        <p:nvPicPr>
+          <p:cNvPr id="4" name="Объект 3"/>
+          <p:cNvPicPr>
+            <a:picLocks noGrp="1" noChangeAspect="1"/>
+          </p:cNvPicPr>
+          <p:nvPr>
+            <p:ph idx="1"/>
+          </p:nvPr>
+        </p:nvPicPr>
+        <p:blipFill>
+          <a:blip r:embed="rId2"/>
+          <a:stretch>
+            <a:fillRect/>
+          </a:stretch>
+        </p:blipFill>
+        <p:spPr>
+          <a:xfrm>
+            <a:off x="1709504" y="1339013"/>
+            <a:ext cx="8772992" cy="5031381"/>
+          </a:xfrm>
+          <a:prstGeom prst="rect">
+            <a:avLst/>
+          </a:prstGeom>
+        </p:spPr>
+      </p:pic>
+    </p:spTree>
+    <p:extLst>
+      <p:ext uri="{BB962C8B-B14F-4D97-AF65-F5344CB8AC3E}">
+        <p14:creationId xmlns:p14="http://schemas.microsoft.com/office/powerpoint/2010/main" val="3414424228"/>
+      </p:ext>
+    </p:extLst>
+  </p:cSld>
+  <p:clrMapOvr>
+    <a:masterClrMapping/>
+  </p:clrMapOvr>
+  <p:timing>
+    <p:tnLst>
+      <p:par>
+        <p:cTn id="1" dur="indefinite" restart="never" nodeType="tmRoot"/>
+      </p:par>
+    </p:tnLst>
+  </p:timing>
+</p:sld>
+</file>
+
+<file path=ppt/slides/slide23.xml><?xml version="1.0" encoding="utf-8"?>
+<p:sld xmlns:a="http://schemas.openxmlformats.org/drawingml/2006/main" xmlns:r="http://schemas.openxmlformats.org/officeDocument/2006/relationships" xmlns:p="http://schemas.openxmlformats.org/presentationml/2006/main">
+  <p:cSld>
+    <p:spTree>
+      <p:nvGrpSpPr>
+        <p:cNvPr id="1" name=""/>
+        <p:cNvGrpSpPr/>
+        <p:nvPr/>
+      </p:nvGrpSpPr>
+      <p:grpSpPr>
+        <a:xfrm>
+          <a:off x="0" y="0"/>
+          <a:ext cx="0" cy="0"/>
+          <a:chOff x="0" y="0"/>
+          <a:chExt cx="0" cy="0"/>
+        </a:xfrm>
+      </p:grpSpPr>
+      <p:sp>
+        <p:nvSpPr>
+          <p:cNvPr id="2" name="Заголовок 1"/>
+          <p:cNvSpPr>
+            <a:spLocks noGrp="1"/>
+          </p:cNvSpPr>
+          <p:nvPr>
+            <p:ph type="title"/>
+          </p:nvPr>
+        </p:nvSpPr>
+        <p:spPr/>
+        <p:txBody>
+          <a:bodyPr/>
+          <a:lstStyle/>
+          <a:p>
+            <a:r>
+              <a:rPr lang="ru-RU" dirty="0" smtClean="0"/>
+              <a:t>Принцип работы </a:t>
+            </a:r>
+            <a:r>
+              <a:rPr lang="en-US" dirty="0" smtClean="0"/>
+              <a:t>NAT</a:t>
+            </a:r>
+            <a:endParaRPr lang="ru-RU" dirty="0"/>
+          </a:p>
+        </p:txBody>
+      </p:sp>
+      <p:pic>
+        <p:nvPicPr>
+          <p:cNvPr id="5" name="Объект 4"/>
+          <p:cNvPicPr>
+            <a:picLocks noGrp="1" noChangeAspect="1"/>
+          </p:cNvPicPr>
+          <p:nvPr>
+            <p:ph idx="1"/>
+          </p:nvPr>
+        </p:nvPicPr>
+        <p:blipFill>
+          <a:blip r:embed="rId2"/>
+          <a:stretch>
+            <a:fillRect/>
+          </a:stretch>
+        </p:blipFill>
+        <p:spPr>
+          <a:xfrm>
+            <a:off x="1514370" y="1331972"/>
+            <a:ext cx="9163259" cy="5214268"/>
+          </a:xfrm>
+          <a:prstGeom prst="rect">
+            <a:avLst/>
+          </a:prstGeom>
+        </p:spPr>
+      </p:pic>
+    </p:spTree>
+    <p:extLst>
+      <p:ext uri="{BB962C8B-B14F-4D97-AF65-F5344CB8AC3E}">
+        <p14:creationId xmlns:p14="http://schemas.microsoft.com/office/powerpoint/2010/main" val="4070950175"/>
+      </p:ext>
+    </p:extLst>
+  </p:cSld>
+  <p:clrMapOvr>
+    <a:masterClrMapping/>
+  </p:clrMapOvr>
+  <p:timing>
+    <p:tnLst>
+      <p:par>
+        <p:cTn id="1" dur="indefinite" restart="never" nodeType="tmRoot"/>
+      </p:par>
+    </p:tnLst>
+  </p:timing>
+</p:sld>
+</file>
+
+<file path=ppt/slides/slide24.xml><?xml version="1.0" encoding="utf-8"?>
+<p:sld xmlns:a="http://schemas.openxmlformats.org/drawingml/2006/main" xmlns:r="http://schemas.openxmlformats.org/officeDocument/2006/relationships" xmlns:p="http://schemas.openxmlformats.org/presentationml/2006/main">
+  <p:cSld>
+    <p:spTree>
+      <p:nvGrpSpPr>
+        <p:cNvPr id="1" name=""/>
+        <p:cNvGrpSpPr/>
+        <p:nvPr/>
+      </p:nvGrpSpPr>
+      <p:grpSpPr>
+        <a:xfrm>
+          <a:off x="0" y="0"/>
+          <a:ext cx="0" cy="0"/>
+          <a:chOff x="0" y="0"/>
+          <a:chExt cx="0" cy="0"/>
+        </a:xfrm>
+      </p:grpSpPr>
+      <p:sp>
+        <p:nvSpPr>
+          <p:cNvPr id="2" name="Заголовок 1"/>
+          <p:cNvSpPr>
+            <a:spLocks noGrp="1"/>
+          </p:cNvSpPr>
+          <p:nvPr>
+            <p:ph type="title"/>
+          </p:nvPr>
+        </p:nvSpPr>
+        <p:spPr/>
+        <p:txBody>
+          <a:bodyPr/>
+          <a:lstStyle/>
+          <a:p>
+            <a:r>
+              <a:rPr lang="ru-RU" b="1" dirty="0"/>
+              <a:t>Терминология </a:t>
+            </a:r>
+            <a:r>
+              <a:rPr lang="af-ZA" b="1" dirty="0" smtClean="0"/>
+              <a:t>NAT</a:t>
+            </a:r>
+            <a:endParaRPr lang="ru-RU" dirty="0"/>
+          </a:p>
+        </p:txBody>
+      </p:sp>
+      <p:pic>
+        <p:nvPicPr>
+          <p:cNvPr id="4" name="Объект 3"/>
+          <p:cNvPicPr>
+            <a:picLocks noGrp="1" noChangeAspect="1"/>
+          </p:cNvPicPr>
+          <p:nvPr>
+            <p:ph idx="1"/>
+          </p:nvPr>
+        </p:nvPicPr>
+        <p:blipFill>
+          <a:blip r:embed="rId2"/>
+          <a:stretch>
+            <a:fillRect/>
+          </a:stretch>
+        </p:blipFill>
+        <p:spPr>
+          <a:xfrm>
+            <a:off x="2487606" y="1291581"/>
+            <a:ext cx="7216787" cy="5307413"/>
+          </a:xfrm>
+          <a:prstGeom prst="rect">
+            <a:avLst/>
+          </a:prstGeom>
+        </p:spPr>
+      </p:pic>
+    </p:spTree>
+    <p:extLst>
+      <p:ext uri="{BB962C8B-B14F-4D97-AF65-F5344CB8AC3E}">
+        <p14:creationId xmlns:p14="http://schemas.microsoft.com/office/powerpoint/2010/main" val="1094086240"/>
+      </p:ext>
+    </p:extLst>
+  </p:cSld>
+  <p:clrMapOvr>
+    <a:masterClrMapping/>
+  </p:clrMapOvr>
+  <p:timing>
+    <p:tnLst>
+      <p:par>
+        <p:cTn id="1" dur="indefinite" restart="never" nodeType="tmRoot"/>
+      </p:par>
+    </p:tnLst>
+  </p:timing>
+</p:sld>
+</file>
+
+<file path=ppt/slides/slide25.xml><?xml version="1.0" encoding="utf-8"?>
+<p:sld xmlns:a="http://schemas.openxmlformats.org/drawingml/2006/main" xmlns:r="http://schemas.openxmlformats.org/officeDocument/2006/relationships" xmlns:p="http://schemas.openxmlformats.org/presentationml/2006/main">
+  <p:cSld>
+    <p:spTree>
+      <p:nvGrpSpPr>
+        <p:cNvPr id="1" name=""/>
+        <p:cNvGrpSpPr/>
+        <p:nvPr/>
+      </p:nvGrpSpPr>
+      <p:grpSpPr>
+        <a:xfrm>
+          <a:off x="0" y="0"/>
+          <a:ext cx="0" cy="0"/>
+          <a:chOff x="0" y="0"/>
+          <a:chExt cx="0" cy="0"/>
+        </a:xfrm>
+      </p:grpSpPr>
+      <p:pic>
+        <p:nvPicPr>
+          <p:cNvPr id="4" name="Объект 3"/>
+          <p:cNvPicPr>
+            <a:picLocks noGrp="1" noChangeAspect="1"/>
+          </p:cNvPicPr>
+          <p:nvPr>
+            <p:ph idx="1"/>
+          </p:nvPr>
+        </p:nvPicPr>
+        <p:blipFill>
+          <a:blip r:embed="rId2"/>
+          <a:stretch>
+            <a:fillRect/>
+          </a:stretch>
+        </p:blipFill>
+        <p:spPr>
+          <a:xfrm>
+            <a:off x="2507418" y="365125"/>
+            <a:ext cx="7177163" cy="6021010"/>
+          </a:xfrm>
+          <a:prstGeom prst="rect">
+            <a:avLst/>
+          </a:prstGeom>
+        </p:spPr>
+      </p:pic>
+      <p:sp>
+        <p:nvSpPr>
+          <p:cNvPr id="2" name="Заголовок 1"/>
+          <p:cNvSpPr>
+            <a:spLocks noGrp="1"/>
+          </p:cNvSpPr>
+          <p:nvPr>
+            <p:ph type="title"/>
+          </p:nvPr>
+        </p:nvSpPr>
+        <p:spPr/>
+        <p:txBody>
+          <a:bodyPr/>
+          <a:lstStyle/>
+          <a:p>
+            <a:r>
+              <a:rPr lang="ru-RU" b="1" dirty="0"/>
+              <a:t>Статический </a:t>
+            </a:r>
+            <a:r>
+              <a:rPr lang="af-ZA" b="1" dirty="0" smtClean="0"/>
+              <a:t>NAT</a:t>
+            </a:r>
+            <a:endParaRPr lang="ru-RU" dirty="0"/>
+          </a:p>
+        </p:txBody>
+      </p:sp>
+    </p:spTree>
+    <p:extLst>
+      <p:ext uri="{BB962C8B-B14F-4D97-AF65-F5344CB8AC3E}">
+        <p14:creationId xmlns:p14="http://schemas.microsoft.com/office/powerpoint/2010/main" val="2112490382"/>
+      </p:ext>
+    </p:extLst>
+  </p:cSld>
+  <p:clrMapOvr>
+    <a:masterClrMapping/>
+  </p:clrMapOvr>
+  <p:timing>
+    <p:tnLst>
+      <p:par>
+        <p:cTn id="1" dur="indefinite" restart="never" nodeType="tmRoot"/>
+      </p:par>
+    </p:tnLst>
+  </p:timing>
+</p:sld>
+</file>
+
+<file path=ppt/slides/slide26.xml><?xml version="1.0" encoding="utf-8"?>
+<p:sld xmlns:a="http://schemas.openxmlformats.org/drawingml/2006/main" xmlns:r="http://schemas.openxmlformats.org/officeDocument/2006/relationships" xmlns:p="http://schemas.openxmlformats.org/presentationml/2006/main">
+  <p:cSld>
+    <p:spTree>
+      <p:nvGrpSpPr>
+        <p:cNvPr id="1" name=""/>
+        <p:cNvGrpSpPr/>
+        <p:nvPr/>
+      </p:nvGrpSpPr>
+      <p:grpSpPr>
+        <a:xfrm>
+          <a:off x="0" y="0"/>
+          <a:ext cx="0" cy="0"/>
+          <a:chOff x="0" y="0"/>
+          <a:chExt cx="0" cy="0"/>
+        </a:xfrm>
+      </p:grpSpPr>
+      <p:pic>
+        <p:nvPicPr>
+          <p:cNvPr id="4" name="Объект 3"/>
+          <p:cNvPicPr>
+            <a:picLocks noGrp="1" noChangeAspect="1"/>
+          </p:cNvPicPr>
+          <p:nvPr>
+            <p:ph idx="1"/>
+          </p:nvPr>
+        </p:nvPicPr>
+        <p:blipFill>
+          <a:blip r:embed="rId2"/>
+          <a:stretch>
+            <a:fillRect/>
+          </a:stretch>
+        </p:blipFill>
+        <p:spPr>
+          <a:xfrm>
+            <a:off x="2141065" y="1027906"/>
+            <a:ext cx="7909869" cy="5734830"/>
+          </a:xfrm>
+          <a:prstGeom prst="rect">
+            <a:avLst/>
+          </a:prstGeom>
+        </p:spPr>
+      </p:pic>
+      <p:sp>
+        <p:nvSpPr>
+          <p:cNvPr id="2" name="Заголовок 1"/>
+          <p:cNvSpPr>
+            <a:spLocks noGrp="1"/>
+          </p:cNvSpPr>
+          <p:nvPr>
+            <p:ph type="title"/>
+          </p:nvPr>
+        </p:nvSpPr>
+        <p:spPr/>
+        <p:txBody>
+          <a:bodyPr/>
+          <a:lstStyle/>
+          <a:p>
+            <a:r>
+              <a:rPr lang="ru-RU" b="1" dirty="0" smtClean="0"/>
+              <a:t>Динамический</a:t>
+            </a:r>
+            <a:r>
+              <a:rPr lang="en-US" b="1" dirty="0" smtClean="0"/>
+              <a:t> NAT</a:t>
+            </a:r>
+            <a:endParaRPr lang="ru-RU" dirty="0"/>
+          </a:p>
+        </p:txBody>
+      </p:sp>
+    </p:spTree>
+    <p:extLst>
+      <p:ext uri="{BB962C8B-B14F-4D97-AF65-F5344CB8AC3E}">
+        <p14:creationId xmlns:p14="http://schemas.microsoft.com/office/powerpoint/2010/main" val="351840792"/>
+      </p:ext>
+    </p:extLst>
+  </p:cSld>
+  <p:clrMapOvr>
+    <a:masterClrMapping/>
+  </p:clrMapOvr>
+  <p:timing>
+    <p:tnLst>
+      <p:par>
+        <p:cTn id="1" dur="indefinite" restart="never" nodeType="tmRoot"/>
+      </p:par>
+    </p:tnLst>
+  </p:timing>
+</p:sld>
+</file>
+
+<file path=ppt/slides/slide27.xml><?xml version="1.0" encoding="utf-8"?>
+<p:sld xmlns:a="http://schemas.openxmlformats.org/drawingml/2006/main" xmlns:r="http://schemas.openxmlformats.org/officeDocument/2006/relationships" xmlns:p="http://schemas.openxmlformats.org/presentationml/2006/main">
+  <p:cSld>
+    <p:spTree>
+      <p:nvGrpSpPr>
+        <p:cNvPr id="1" name=""/>
+        <p:cNvGrpSpPr/>
+        <p:nvPr/>
+      </p:nvGrpSpPr>
+      <p:grpSpPr>
+        <a:xfrm>
+          <a:off x="0" y="0"/>
+          <a:ext cx="0" cy="0"/>
+          <a:chOff x="0" y="0"/>
+          <a:chExt cx="0" cy="0"/>
+        </a:xfrm>
+      </p:grpSpPr>
+      <p:sp>
+        <p:nvSpPr>
+          <p:cNvPr id="2" name="Заголовок 1"/>
+          <p:cNvSpPr>
+            <a:spLocks noGrp="1"/>
+          </p:cNvSpPr>
+          <p:nvPr>
+            <p:ph type="title"/>
+          </p:nvPr>
+        </p:nvSpPr>
+        <p:spPr/>
+        <p:txBody>
+          <a:bodyPr>
+            <a:normAutofit/>
+          </a:bodyPr>
+          <a:lstStyle/>
+          <a:p>
+            <a:r>
+              <a:rPr lang="af-ZA" b="1" dirty="0" smtClean="0"/>
+              <a:t>Many-to-One</a:t>
+            </a:r>
+            <a:endParaRPr lang="ru-RU" dirty="0"/>
+          </a:p>
+        </p:txBody>
+      </p:sp>
+      <p:pic>
+        <p:nvPicPr>
+          <p:cNvPr id="5" name="Объект 4"/>
+          <p:cNvPicPr>
+            <a:picLocks noGrp="1" noChangeAspect="1"/>
+          </p:cNvPicPr>
+          <p:nvPr>
+            <p:ph idx="1"/>
+          </p:nvPr>
+        </p:nvPicPr>
+        <p:blipFill>
+          <a:blip r:embed="rId2"/>
+          <a:stretch>
+            <a:fillRect/>
+          </a:stretch>
+        </p:blipFill>
+        <p:spPr>
+          <a:xfrm>
+            <a:off x="2377208" y="1365620"/>
+            <a:ext cx="7437583" cy="5294920"/>
+          </a:xfrm>
+          <a:prstGeom prst="rect">
+            <a:avLst/>
+          </a:prstGeom>
+        </p:spPr>
+      </p:pic>
+    </p:spTree>
+    <p:extLst>
+      <p:ext uri="{BB962C8B-B14F-4D97-AF65-F5344CB8AC3E}">
+        <p14:creationId xmlns:p14="http://schemas.microsoft.com/office/powerpoint/2010/main" val="817870506"/>
       </p:ext>
     </p:extLst>
   </p:cSld>
